--- a/app/python/Certificate-Generator/multi_template.pptx
+++ b/app/python/Certificate-Generator/multi_template.pptx
@@ -256,8 +256,11 @@
     </a:lvl9pPr>
   </p:defaultTextStyle>
   <p:extLst>
+    <p:ext uri="{EFAFB233-063F-42B5-8137-9DF3F51BA10A}">
+      <p15:sldGuideLst xmlns:p15="http://schemas.microsoft.com/office/powerpoint/2012/main"/>
+    </p:ext>
     <p:ext uri="GoogleSlidesCustomDataVersion2">
-      <go:slidesCustomData xmlns:go="http://customooxmlschemas.google.com/" xmlns:ahyp="http://schemas.microsoft.com/office/drawing/2018/hyperlinkcolor" xmlns:p15="http://schemas.microsoft.com/office/powerpoint/2012/main" xmlns:p14="http://schemas.microsoft.com/office/powerpoint/2010/main" xmlns:com="http://schemas.openxmlformats.org/drawingml/2006/compatibility" xmlns:pvml="urn:schemas-microsoft-com:office:powerpoint" xmlns:v="urn:schemas-microsoft-com:vml" xmlns:o="urn:schemas-microsoft-com:office:office" xmlns:dgm="http://schemas.openxmlformats.org/drawingml/2006/diagram" xmlns:c="http://schemas.openxmlformats.org/drawingml/2006/chart" xmlns:mv="urn:schemas-microsoft-com:mac:vml" xmlns:mc="http://schemas.openxmlformats.org/markup-compatibility/2006" xmlns="" r:id="rId12" roundtripDataSignature="AMtx7ming4Mi+GRi9JGsZvnJdmikW+Niyg=="/>
+      <go:slidesCustomData xmlns="" xmlns:mc="http://schemas.openxmlformats.org/markup-compatibility/2006" xmlns:mv="urn:schemas-microsoft-com:mac:vml" xmlns:c="http://schemas.openxmlformats.org/drawingml/2006/chart" xmlns:dgm="http://schemas.openxmlformats.org/drawingml/2006/diagram" xmlns:o="urn:schemas-microsoft-com:office:office" xmlns:v="urn:schemas-microsoft-com:vml" xmlns:pvml="urn:schemas-microsoft-com:office:powerpoint" xmlns:com="http://schemas.openxmlformats.org/drawingml/2006/compatibility" xmlns:p14="http://schemas.microsoft.com/office/powerpoint/2010/main" xmlns:p15="http://schemas.microsoft.com/office/powerpoint/2012/main" xmlns:ahyp="http://schemas.microsoft.com/office/drawing/2018/hyperlinkcolor" xmlns:go="http://customooxmlschemas.google.com/" r:id="rId12" roundtripDataSignature="AMtx7ming4Mi+GRi9JGsZvnJdmikW+Niyg=="/>
     </p:ext>
   </p:extLst>
 </p:presentation>
@@ -11241,7 +11244,7 @@
                 <a:cs typeface="Calibri"/>
                 <a:sym typeface="Calibri"/>
               </a:rPr>
-              <a:t>Regional Crop Biotechnology Symposium”</a:t>
+              <a:t>&lt;&lt;EVENT_TITLE&gt;&gt;”</a:t>
             </a:r>
             <a:r>
               <a:rPr lang="en-US" sz="1400" b="0" i="0" u="none" strike="noStrike" cap="none" dirty="0">
@@ -11277,7 +11280,7 @@
                 <a:cs typeface="Calibri"/>
                 <a:sym typeface="Calibri"/>
               </a:rPr>
-              <a:t>, last March 5, 2025.</a:t>
+              <a:t>, last &lt;&lt;EVENT_DATE&gt;&gt;.</a:t>
             </a:r>
             <a:endParaRPr sz="1400" b="0" i="0" u="none" strike="noStrike" cap="none" dirty="0">
               <a:solidFill>
@@ -11347,19 +11350,7 @@
                 <a:cs typeface="Calibri"/>
                 <a:sym typeface="Calibri"/>
               </a:rPr>
-              <a:t>5</a:t>
-            </a:r>
-            <a:r>
-              <a:rPr lang="en-US" sz="1400" b="0" i="0" u="none" strike="noStrike" cap="none" baseline="30000" dirty="0">
-                <a:solidFill>
-                  <a:schemeClr val="dk1"/>
-                </a:solidFill>
-                <a:latin typeface="Calibri"/>
-                <a:ea typeface="Calibri"/>
-                <a:cs typeface="Calibri"/>
-                <a:sym typeface="Calibri"/>
-              </a:rPr>
-              <a:t>th</a:t>
+              <a:t>&lt;&lt;DATE_GIVEN&gt;&gt;</a:t>
             </a:r>
             <a:r>
               <a:rPr lang="en-US" sz="1400" b="0" i="0" u="none" strike="noStrike" cap="none" dirty="0">
@@ -11371,7 +11362,7 @@
                 <a:cs typeface="Calibri"/>
                 <a:sym typeface="Calibri"/>
               </a:rPr>
-              <a:t> day of March, 2025.</a:t>
+              <a:t>.</a:t>
             </a:r>
             <a:endParaRPr sz="1400" b="0" i="0" u="none" strike="noStrike" cap="none" dirty="0">
               <a:solidFill>
